--- a/docs/tasks/ppt/CarbonLife-答辩PPT.pptx
+++ b/docs/tasks/ppt/CarbonLife-答辩PPT.pptx
@@ -726,7 +726,7 @@
           <a:lstStyle/>
           <a:p>
             <a:r>
-              <a:t>基于 HarmonyOS / OpenHarmony 原生开发，使用 ArkTS 与 ArkUI 声明式 UI，Stage 模型、SDK 26.0.0；本机存储、端侧 AI、分布式数据与后台提醒。</a:t>
+              <a:t>基于 HarmonyOS / OpenHarmony 原生开发，使用 ArkTS 与 ArkUI 声明式 UI，Stage 模型、SDK 26.0.0；本机存储、端侧 AI、分布式数据、后台提醒，以及可开关的 AGC 云备份。</a:t>
             </a:r>
           </a:p>
         </p:txBody>
@@ -796,7 +796,7 @@
           <a:lstStyle/>
           <a:p>
             <a:r>
-              <a:t>记录只存本机、不上云；家庭数据只在同一账号设备间同步，不经过第三方；识图在本机完成。</a:t>
+              <a:t>记录默认只存本机（Preferences），云备份是可选的独立开关、默认关闭；家庭数据只在同一账号设备间同步，不经过第三方；识图在本机完成。</a:t>
             </a:r>
           </a:p>
         </p:txBody>
@@ -866,7 +866,7 @@
           <a:lstStyle/>
           <a:p>
             <a:r>
-              <a:t>项目采用「写审分离 + 设备验证」，在模拟器上逐条核对验收清单；记录刷新、图表刷新、家庭聚合已在复测中通过，权限弹窗与跨设备聚合仍需真机复测。</a:t>
+              <a:t>项目采用「写审分离 + 设备验证」，在模拟器上逐条核对验收清单；记录刷新、图表刷新、家庭聚合（本地侧）与设备端 UI 冒烟 20/20 已通过，分布式权限弹窗与跨设备家庭聚合仍需真机复测。</a:t>
             </a:r>
           </a:p>
         </p:txBody>
@@ -936,7 +936,7 @@
           <a:lstStyle/>
           <a:p>
             <a:r>
-              <a:t>后续计划对接真实碳普惠平台、增加数据导入与云备份、接入系统无障碍与平板布局。谢谢观看。</a:t>
+              <a:t>后续计划对接真实碳普惠平台、完成云备份冲突合并与签名构建验证、接入系统无障碍与补齐平板多列布局。谢谢观看。</a:t>
             </a:r>
           </a:p>
         </p:txBody>
@@ -1216,7 +1216,7 @@
           <a:lstStyle/>
           <a:p>
             <a:r>
-              <a:t>项目包含低碳行为记录、端侧 AI 识图、数据看板与导出、积分与荣誉、家庭碳积分、每日提醒、双碳科普、深浅主题八大功能。</a:t>
+              <a:t>项目包含低碳行为记录、端侧 AI 识图、数据看板与导入导出、积分与荣誉、家庭碳积分、每日提醒、双碳科普、深浅主题八大功能；数据还支持本地整包备份与可选的云备份。</a:t>
             </a:r>
           </a:p>
         </p:txBody>
@@ -1426,7 +1426,7 @@
           <a:lstStyle/>
           <a:p>
             <a:r>
-              <a:t>提供日 / 周 / 月 / 年趋势，折线、柱状、饼图多种呈现，并支持 CSV / JSON 导出。</a:t>
+              <a:t>提供日 / 周 / 月 / 年趋势，折线、柱状、饼图多种呈现；支持 CSV / JSON 导入与导出，导入时逐字段校验归一化。</a:t>
             </a:r>
           </a:p>
         </p:txBody>
@@ -5044,7 +5044,7 @@
                 <a:ea typeface="Microsoft YaHei"/>
                 <a:cs typeface="Microsoft YaHei"/>
               </a:rPr>
-              <a:t>无云隐私</a:t>
+              <a:t>隐私优先</a:t>
             </a:r>
           </a:p>
         </p:txBody>
@@ -6873,7 +6873,7 @@
                 <a:ea typeface="Microsoft YaHei"/>
                 <a:cs typeface="Microsoft YaHei"/>
               </a:rPr>
-              <a:t>读数滚动 / 图表入场，可一键「减弱动效」</a:t>
+              <a:t>读数滚动 / 图表入场，支持「减弱动效」开关</a:t>
             </a:r>
           </a:p>
         </p:txBody>
@@ -7549,7 +7549,7 @@
                 <a:ea typeface="Microsoft YaHei"/>
                 <a:cs typeface="Microsoft YaHei"/>
               </a:rPr>
-              <a:t>CarbonStore · CarbonFactors · Family / Mall / Reminder / Vision Service</a:t>
+              <a:t>CarbonStore · CarbonFactors · Family / Mall / Reminder / Vision · Backup</a:t>
             </a:r>
           </a:p>
         </p:txBody>
@@ -7951,6 +7951,27 @@
                 <a:cs typeface="Microsoft YaHei"/>
               </a:rPr>
               <a:t>· 同步：DistributedDataObject</a:t>
+            </a:r>
+          </a:p>
+          <a:p>
+            <a:pPr algn="l">
+              <a:spcBef>
+                <a:spcPts val="700"/>
+              </a:spcBef>
+              <a:spcAft>
+                <a:spcPts val="700"/>
+              </a:spcAft>
+            </a:pPr>
+            <a:r>
+              <a:rPr sz="1300" b="0">
+                <a:solidFill>
+                  <a:srgbClr val="14201A"/>
+                </a:solidFill>
+                <a:latin typeface="Microsoft YaHei"/>
+                <a:ea typeface="Microsoft YaHei"/>
+                <a:cs typeface="Microsoft YaHei"/>
+              </a:rPr>
+              <a:t>· 备份：AGC 云存储（可开关）</a:t>
             </a:r>
           </a:p>
         </p:txBody>
@@ -8339,7 +8360,7 @@
                 <a:ea typeface="Microsoft YaHei"/>
                 <a:cs typeface="Microsoft YaHei"/>
               </a:rPr>
-              <a:t>记录仅存本机</a:t>
+              <a:t>默认仅存本机</a:t>
             </a:r>
           </a:p>
         </p:txBody>
@@ -8383,7 +8404,7 @@
                 <a:ea typeface="Microsoft YaHei"/>
                 <a:cs typeface="Microsoft YaHei"/>
               </a:rPr>
-              <a:t>低碳记录保存在本机 Preferences，不上传云端。</a:t>
+              <a:t>记录默认保存在本机 Preferences；云备份为独立开关，默认关闭。</a:t>
             </a:r>
           </a:p>
         </p:txBody>
@@ -9297,7 +9318,7 @@
                 <a:ea typeface="Microsoft YaHei"/>
                 <a:cs typeface="Microsoft YaHei"/>
               </a:rPr>
-              <a:t>· 依据 QA_REPORT.md 的复测结论</a:t>
+              <a:t>· 依据验收清单与复测记录归档</a:t>
             </a:r>
           </a:p>
         </p:txBody>
@@ -9506,7 +9527,7 @@
                 <a:ea typeface="Microsoft YaHei"/>
                 <a:cs typeface="Microsoft YaHei"/>
               </a:rPr>
-              <a:t>记录增删实时刷新 · 图表刷新 · 家庭聚合（本地侧）</a:t>
+              <a:t>记录增删实时刷新 · 图表刷新 · 家庭聚合（本地侧） · UI 冒烟 20/20（手机 + 平板）</a:t>
             </a:r>
           </a:p>
         </p:txBody>
@@ -9907,7 +9928,7 @@
                 <a:ea typeface="Microsoft YaHei"/>
                 <a:cs typeface="Microsoft YaHei"/>
               </a:rPr>
-              <a:t>· 数据云备份（AGC）与冲突合并策略</a:t>
+              <a:t>· 云备份冲突合并策略与签名构建端到端验证</a:t>
             </a:r>
           </a:p>
           <a:p>
@@ -9949,7 +9970,7 @@
                 <a:ea typeface="Microsoft YaHei"/>
                 <a:cs typeface="Microsoft YaHei"/>
               </a:rPr>
-              <a:t>· 平板多列布局适配</a:t>
+              <a:t>· 平板其余页面补齐多列布局</a:t>
             </a:r>
           </a:p>
         </p:txBody>
@@ -10920,7 +10941,7 @@
                 <a:ea typeface="Microsoft YaHei"/>
                 <a:cs typeface="Microsoft YaHei"/>
               </a:rPr>
-              <a:t>这决定了我们坚持「数据留在本机、不依赖云」。</a:t>
+              <a:t>这决定了我们坚持「数据默认留在本机，云备份由用户自主开关」。</a:t>
             </a:r>
           </a:p>
         </p:txBody>
@@ -13516,7 +13537,7 @@
                 <a:ea typeface="Microsoft YaHei"/>
                 <a:cs typeface="Microsoft YaHei"/>
               </a:rPr>
-              <a:t>趋势图表 + CSV/JSON</a:t>
+              <a:t>趋势图表 + 导入导出</a:t>
             </a:r>
           </a:p>
         </p:txBody>
@@ -16748,7 +16769,7 @@
                 <a:ea typeface="Microsoft YaHei"/>
                 <a:cs typeface="Microsoft YaHei"/>
               </a:rPr>
-              <a:t>可导出</a:t>
+              <a:t>导入导出</a:t>
             </a:r>
           </a:p>
         </p:txBody>
@@ -16785,7 +16806,7 @@
                 <a:ea typeface="Microsoft YaHei"/>
                 <a:cs typeface="Microsoft YaHei"/>
               </a:rPr>
-              <a:t>CSV / JSON（UTF-8 BOM，Excel 不乱码）</a:t>
+              <a:t>CSV / JSON 互导（UTF-8 BOM，Excel 不乱码）</a:t>
             </a:r>
           </a:p>
         </p:txBody>
@@ -17557,8 +17578,8 @@
         </p:nvSpPr>
         <p:spPr>
           <a:xfrm>
-            <a:off x="8364744" y="1636776"/>
-            <a:ext cx="2290031" cy="4498848"/>
+            <a:off x="8125719" y="1636776"/>
+            <a:ext cx="2768080" cy="4498848"/>
           </a:xfrm>
           <a:prstGeom prst="roundRect">
             <a:avLst/>
@@ -17582,7 +17603,7 @@
       </p:sp>
       <p:pic>
         <p:nvPicPr>
-          <p:cNvPr id="21" name="Picture 20" descr="home.jpg"/>
+          <p:cNvPr id="21" name="Picture 20" descr="family.jpg"/>
           <p:cNvPicPr>
             <a:picLocks noChangeAspect="1"/>
           </p:cNvPicPr>
@@ -17596,8 +17617,8 @@
         </p:blipFill>
         <p:spPr>
           <a:xfrm>
-            <a:off x="8511048" y="1783080"/>
-            <a:ext cx="1997423" cy="4206240"/>
+            <a:off x="8272023" y="1783080"/>
+            <a:ext cx="2475472" cy="4206240"/>
           </a:xfrm>
           <a:prstGeom prst="rect">
             <a:avLst/>

--- a/docs/tasks/ppt/CarbonLife-答辩PPT.pptx
+++ b/docs/tasks/ppt/CarbonLife-答辩PPT.pptx
@@ -17578,8 +17578,8 @@
         </p:nvSpPr>
         <p:spPr>
           <a:xfrm>
-            <a:off x="8125719" y="1636776"/>
-            <a:ext cx="2768080" cy="4498848"/>
+            <a:off x="8313208" y="1636776"/>
+            <a:ext cx="2393102" cy="4498848"/>
           </a:xfrm>
           <a:prstGeom prst="roundRect">
             <a:avLst/>
@@ -17617,8 +17617,8 @@
         </p:blipFill>
         <p:spPr>
           <a:xfrm>
-            <a:off x="8272023" y="1783080"/>
-            <a:ext cx="2475472" cy="4206240"/>
+            <a:off x="8459512" y="1783080"/>
+            <a:ext cx="2100494" cy="4206240"/>
           </a:xfrm>
           <a:prstGeom prst="rect">
             <a:avLst/>

--- a/docs/tasks/ppt/CarbonLife-答辩PPT.pptx
+++ b/docs/tasks/ppt/CarbonLife-答辩PPT.pptx
@@ -586,7 +586,7 @@
           <a:lstStyle/>
           <a:p>
             <a:r>
-              <a:t>碳积分可兑换权益、解锁徽章与植树证书，今日任务完成后自动发放积分。</a:t>
+              <a:t>碳积分可兑换权益、解锁徽章与植树证书；本轮新增的碳小树按真实记录长成，连续记录有加成、断签不掉级，下方这张碳账单把所有数字汇成一页可分享的报告。</a:t>
             </a:r>
           </a:p>
         </p:txBody>
@@ -1216,7 +1216,7 @@
           <a:lstStyle/>
           <a:p>
             <a:r>
-              <a:t>项目包含低碳行为记录、端侧 AI 识图、数据看板与导入导出、积分与荣誉、家庭碳积分、每日提醒、双碳科普、深浅主题八大功能；数据还支持本地整包备份与可选的云备份。</a:t>
+              <a:t>项目共 10 大功能：低碳行为记录、端侧 AI 识图、数据看板与导入导出、积分与荣誉、家庭碳积分、每日提醒、双碳科普、深浅主题，以及本轮新增的碳小树与碳账单；数据还支持本地整包备份与可选的云备份。</a:t>
             </a:r>
           </a:p>
         </p:txBody>
@@ -1426,7 +1426,7 @@
           <a:lstStyle/>
           <a:p>
             <a:r>
-              <a:t>提供日 / 周 / 月 / 年趋势，折线、柱状、饼图多种呈现；支持 CSV / JSON 导入与导出，导入时逐字段校验归一化。</a:t>
+              <a:t>提供日 / 周 / 月 / 年趋势，折线、柱状、饼图多种呈现；支持 CSV / JSON 导入与导出（导入逐字段校验归一化），并可将碳账单导出为 PNG 分享图。</a:t>
             </a:r>
           </a:p>
         </p:txBody>
@@ -5465,7 +5465,7 @@
                 <a:ea typeface="Microsoft YaHei"/>
                 <a:cs typeface="Microsoft YaHei"/>
               </a:rPr>
-              <a:t>减排有回馈：积分 · 徽章 · 植树</a:t>
+              <a:t>减排有回馈：积分 · 荣誉 · 树苗</a:t>
             </a:r>
           </a:p>
         </p:txBody>
@@ -5937,7 +5937,7 @@
                 <a:ea typeface="Microsoft YaHei"/>
                 <a:cs typeface="Microsoft YaHei"/>
               </a:rPr>
-              <a:t>任务</a:t>
+              <a:t>树苗</a:t>
             </a:r>
           </a:p>
         </p:txBody>
@@ -5974,7 +5974,7 @@
                 <a:ea typeface="Microsoft YaHei"/>
                 <a:cs typeface="Microsoft YaHei"/>
               </a:rPr>
-              <a:t>今日任务完成后自动发放积分</a:t>
+              <a:t>按真实记录养成，断签不掉级</a:t>
             </a:r>
           </a:p>
         </p:txBody>
@@ -5987,8 +5987,8 @@
         </p:nvSpPr>
         <p:spPr>
           <a:xfrm>
-            <a:off x="8364744" y="1636776"/>
-            <a:ext cx="2290031" cy="4498848"/>
+            <a:off x="8097786" y="1636776"/>
+            <a:ext cx="2823946" cy="4498848"/>
           </a:xfrm>
           <a:prstGeom prst="roundRect">
             <a:avLst/>
@@ -6012,7 +6012,7 @@
       </p:sp>
       <p:pic>
         <p:nvPicPr>
-          <p:cNvPr id="21" name="Picture 20" descr="rewards.jpg"/>
+          <p:cNvPr id="21" name="Picture 20" descr="report.jpg"/>
           <p:cNvPicPr>
             <a:picLocks noChangeAspect="1"/>
           </p:cNvPicPr>
@@ -6026,8 +6026,8 @@
         </p:blipFill>
         <p:spPr>
           <a:xfrm>
-            <a:off x="8511048" y="1783080"/>
-            <a:ext cx="1997423" cy="4206240"/>
+            <a:off x="8244090" y="1783080"/>
+            <a:ext cx="2531338" cy="4206240"/>
           </a:xfrm>
           <a:prstGeom prst="rect">
             <a:avLst/>
@@ -12995,7 +12995,7 @@
                 <a:ea typeface="Microsoft YaHei"/>
                 <a:cs typeface="Microsoft YaHei"/>
               </a:rPr>
-              <a:t>8 大功能，覆盖记录—计算—激励的完整闭环</a:t>
+              <a:t>10 大功能，覆盖记录—计算—激励—回馈的完整闭环</a:t>
             </a:r>
           </a:p>
         </p:txBody>
@@ -13037,8 +13037,8 @@
         </p:nvSpPr>
         <p:spPr>
           <a:xfrm>
-            <a:off x="640080" y="1737360"/>
-            <a:ext cx="2535859" cy="1371600"/>
+            <a:off x="640080" y="1700784"/>
+            <a:ext cx="2535859" cy="1152144"/>
           </a:xfrm>
           <a:prstGeom prst="roundRect">
             <a:avLst/>
@@ -13068,7 +13068,7 @@
         </p:nvSpPr>
         <p:spPr>
           <a:xfrm>
-            <a:off x="640080" y="1737360"/>
+            <a:off x="640080" y="1700784"/>
             <a:ext cx="2535859" cy="54864"/>
           </a:xfrm>
           <a:prstGeom prst="rect">
@@ -13097,7 +13097,7 @@
         </p:nvSpPr>
         <p:spPr>
           <a:xfrm>
-            <a:off x="868680" y="1975104"/>
+            <a:off x="868680" y="1883664"/>
             <a:ext cx="2078659" cy="274320"/>
           </a:xfrm>
           <a:prstGeom prst="rect">
@@ -13113,7 +13113,7 @@
           <a:p>
             <a:pPr algn="l"/>
             <a:r>
-              <a:rPr sz="1300" b="1">
+              <a:rPr sz="1200" b="1">
                 <a:solidFill>
                   <a:srgbClr val="E8A317"/>
                 </a:solidFill>
@@ -13134,7 +13134,7 @@
         </p:nvSpPr>
         <p:spPr>
           <a:xfrm>
-            <a:off x="868680" y="2267712"/>
+            <a:off x="868680" y="2157984"/>
             <a:ext cx="2078659" cy="365760"/>
           </a:xfrm>
           <a:prstGeom prst="rect">
@@ -13171,8 +13171,8 @@
         </p:nvSpPr>
         <p:spPr>
           <a:xfrm>
-            <a:off x="868680" y="2670048"/>
-            <a:ext cx="2078659" cy="320040"/>
+            <a:off x="868680" y="2542032"/>
+            <a:ext cx="2078659" cy="292608"/>
           </a:xfrm>
           <a:prstGeom prst="rect">
             <a:avLst/>
@@ -13208,8 +13208,8 @@
         </p:nvSpPr>
         <p:spPr>
           <a:xfrm>
-            <a:off x="3431971" y="1737360"/>
-            <a:ext cx="2535859" cy="1371600"/>
+            <a:off x="3431971" y="1700784"/>
+            <a:ext cx="2535859" cy="1152144"/>
           </a:xfrm>
           <a:prstGeom prst="roundRect">
             <a:avLst/>
@@ -13239,7 +13239,7 @@
         </p:nvSpPr>
         <p:spPr>
           <a:xfrm>
-            <a:off x="3431971" y="1737360"/>
+            <a:off x="3431971" y="1700784"/>
             <a:ext cx="2535859" cy="54864"/>
           </a:xfrm>
           <a:prstGeom prst="rect">
@@ -13268,7 +13268,7 @@
         </p:nvSpPr>
         <p:spPr>
           <a:xfrm>
-            <a:off x="3660571" y="1975104"/>
+            <a:off x="3660571" y="1883664"/>
             <a:ext cx="2078659" cy="274320"/>
           </a:xfrm>
           <a:prstGeom prst="rect">
@@ -13284,7 +13284,7 @@
           <a:p>
             <a:pPr algn="l"/>
             <a:r>
-              <a:rPr sz="1300" b="1">
+              <a:rPr sz="1200" b="1">
                 <a:solidFill>
                   <a:srgbClr val="E8A317"/>
                 </a:solidFill>
@@ -13305,7 +13305,7 @@
         </p:nvSpPr>
         <p:spPr>
           <a:xfrm>
-            <a:off x="3660571" y="2267712"/>
+            <a:off x="3660571" y="2157984"/>
             <a:ext cx="2078659" cy="365760"/>
           </a:xfrm>
           <a:prstGeom prst="rect">
@@ -13342,8 +13342,8 @@
         </p:nvSpPr>
         <p:spPr>
           <a:xfrm>
-            <a:off x="3660571" y="2670048"/>
-            <a:ext cx="2078659" cy="320040"/>
+            <a:off x="3660571" y="2542032"/>
+            <a:ext cx="2078659" cy="292608"/>
           </a:xfrm>
           <a:prstGeom prst="rect">
             <a:avLst/>
@@ -13379,8 +13379,8 @@
         </p:nvSpPr>
         <p:spPr>
           <a:xfrm>
-            <a:off x="6223863" y="1737360"/>
-            <a:ext cx="2535859" cy="1371600"/>
+            <a:off x="6223863" y="1700784"/>
+            <a:ext cx="2535859" cy="1152144"/>
           </a:xfrm>
           <a:prstGeom prst="roundRect">
             <a:avLst/>
@@ -13410,7 +13410,7 @@
         </p:nvSpPr>
         <p:spPr>
           <a:xfrm>
-            <a:off x="6223863" y="1737360"/>
+            <a:off x="6223863" y="1700784"/>
             <a:ext cx="2535859" cy="54864"/>
           </a:xfrm>
           <a:prstGeom prst="rect">
@@ -13439,7 +13439,7 @@
         </p:nvSpPr>
         <p:spPr>
           <a:xfrm>
-            <a:off x="6452463" y="1975104"/>
+            <a:off x="6452463" y="1883664"/>
             <a:ext cx="2078659" cy="274320"/>
           </a:xfrm>
           <a:prstGeom prst="rect">
@@ -13455,7 +13455,7 @@
           <a:p>
             <a:pPr algn="l"/>
             <a:r>
-              <a:rPr sz="1300" b="1">
+              <a:rPr sz="1200" b="1">
                 <a:solidFill>
                   <a:srgbClr val="E8A317"/>
                 </a:solidFill>
@@ -13476,7 +13476,7 @@
         </p:nvSpPr>
         <p:spPr>
           <a:xfrm>
-            <a:off x="6452463" y="2267712"/>
+            <a:off x="6452463" y="2157984"/>
             <a:ext cx="2078659" cy="365760"/>
           </a:xfrm>
           <a:prstGeom prst="rect">
@@ -13513,8 +13513,8 @@
         </p:nvSpPr>
         <p:spPr>
           <a:xfrm>
-            <a:off x="6452463" y="2670048"/>
-            <a:ext cx="2078659" cy="320040"/>
+            <a:off x="6452463" y="2542032"/>
+            <a:ext cx="2078659" cy="292608"/>
           </a:xfrm>
           <a:prstGeom prst="rect">
             <a:avLst/>
@@ -13550,8 +13550,8 @@
         </p:nvSpPr>
         <p:spPr>
           <a:xfrm>
-            <a:off x="9015755" y="1737360"/>
-            <a:ext cx="2535859" cy="1371600"/>
+            <a:off x="9015755" y="1700784"/>
+            <a:ext cx="2535859" cy="1152144"/>
           </a:xfrm>
           <a:prstGeom prst="roundRect">
             <a:avLst/>
@@ -13581,7 +13581,7 @@
         </p:nvSpPr>
         <p:spPr>
           <a:xfrm>
-            <a:off x="9015755" y="1737360"/>
+            <a:off x="9015755" y="1700784"/>
             <a:ext cx="2535859" cy="54864"/>
           </a:xfrm>
           <a:prstGeom prst="rect">
@@ -13610,7 +13610,7 @@
         </p:nvSpPr>
         <p:spPr>
           <a:xfrm>
-            <a:off x="9244355" y="1975104"/>
+            <a:off x="9244355" y="1883664"/>
             <a:ext cx="2078659" cy="274320"/>
           </a:xfrm>
           <a:prstGeom prst="rect">
@@ -13626,7 +13626,7 @@
           <a:p>
             <a:pPr algn="l"/>
             <a:r>
-              <a:rPr sz="1300" b="1">
+              <a:rPr sz="1200" b="1">
                 <a:solidFill>
                   <a:srgbClr val="E8A317"/>
                 </a:solidFill>
@@ -13647,7 +13647,7 @@
         </p:nvSpPr>
         <p:spPr>
           <a:xfrm>
-            <a:off x="9244355" y="2267712"/>
+            <a:off x="9244355" y="2157984"/>
             <a:ext cx="2078659" cy="365760"/>
           </a:xfrm>
           <a:prstGeom prst="rect">
@@ -13684,8 +13684,8 @@
         </p:nvSpPr>
         <p:spPr>
           <a:xfrm>
-            <a:off x="9244355" y="2670048"/>
-            <a:ext cx="2078659" cy="320040"/>
+            <a:off x="9244355" y="2542032"/>
+            <a:ext cx="2078659" cy="292608"/>
           </a:xfrm>
           <a:prstGeom prst="rect">
             <a:avLst/>
@@ -13721,8 +13721,8 @@
         </p:nvSpPr>
         <p:spPr>
           <a:xfrm>
-            <a:off x="640080" y="3383280"/>
-            <a:ext cx="2535859" cy="1371600"/>
+            <a:off x="640080" y="3035808"/>
+            <a:ext cx="2535859" cy="1152144"/>
           </a:xfrm>
           <a:prstGeom prst="roundRect">
             <a:avLst/>
@@ -13752,7 +13752,7 @@
         </p:nvSpPr>
         <p:spPr>
           <a:xfrm>
-            <a:off x="640080" y="3383280"/>
+            <a:off x="640080" y="3035808"/>
             <a:ext cx="2535859" cy="54864"/>
           </a:xfrm>
           <a:prstGeom prst="rect">
@@ -13781,7 +13781,7 @@
         </p:nvSpPr>
         <p:spPr>
           <a:xfrm>
-            <a:off x="868680" y="3621024"/>
+            <a:off x="868680" y="3218688"/>
             <a:ext cx="2078659" cy="274320"/>
           </a:xfrm>
           <a:prstGeom prst="rect">
@@ -13797,7 +13797,7 @@
           <a:p>
             <a:pPr algn="l"/>
             <a:r>
-              <a:rPr sz="1300" b="1">
+              <a:rPr sz="1200" b="1">
                 <a:solidFill>
                   <a:srgbClr val="E8A317"/>
                 </a:solidFill>
@@ -13818,7 +13818,7 @@
         </p:nvSpPr>
         <p:spPr>
           <a:xfrm>
-            <a:off x="868680" y="3913632"/>
+            <a:off x="868680" y="3493008"/>
             <a:ext cx="2078659" cy="365760"/>
           </a:xfrm>
           <a:prstGeom prst="rect">
@@ -13855,8 +13855,8 @@
         </p:nvSpPr>
         <p:spPr>
           <a:xfrm>
-            <a:off x="868680" y="4315968"/>
-            <a:ext cx="2078659" cy="320040"/>
+            <a:off x="868680" y="3877056"/>
+            <a:ext cx="2078659" cy="292608"/>
           </a:xfrm>
           <a:prstGeom prst="rect">
             <a:avLst/>
@@ -13892,8 +13892,8 @@
         </p:nvSpPr>
         <p:spPr>
           <a:xfrm>
-            <a:off x="3431971" y="3383280"/>
-            <a:ext cx="2535859" cy="1371600"/>
+            <a:off x="3431971" y="3035808"/>
+            <a:ext cx="2535859" cy="1152144"/>
           </a:xfrm>
           <a:prstGeom prst="roundRect">
             <a:avLst/>
@@ -13923,7 +13923,7 @@
         </p:nvSpPr>
         <p:spPr>
           <a:xfrm>
-            <a:off x="3431971" y="3383280"/>
+            <a:off x="3431971" y="3035808"/>
             <a:ext cx="2535859" cy="54864"/>
           </a:xfrm>
           <a:prstGeom prst="rect">
@@ -13952,7 +13952,7 @@
         </p:nvSpPr>
         <p:spPr>
           <a:xfrm>
-            <a:off x="3660571" y="3621024"/>
+            <a:off x="3660571" y="3218688"/>
             <a:ext cx="2078659" cy="274320"/>
           </a:xfrm>
           <a:prstGeom prst="rect">
@@ -13968,7 +13968,7 @@
           <a:p>
             <a:pPr algn="l"/>
             <a:r>
-              <a:rPr sz="1300" b="1">
+              <a:rPr sz="1200" b="1">
                 <a:solidFill>
                   <a:srgbClr val="E8A317"/>
                 </a:solidFill>
@@ -13989,7 +13989,7 @@
         </p:nvSpPr>
         <p:spPr>
           <a:xfrm>
-            <a:off x="3660571" y="3913632"/>
+            <a:off x="3660571" y="3493008"/>
             <a:ext cx="2078659" cy="365760"/>
           </a:xfrm>
           <a:prstGeom prst="rect">
@@ -14026,8 +14026,8 @@
         </p:nvSpPr>
         <p:spPr>
           <a:xfrm>
-            <a:off x="3660571" y="4315968"/>
-            <a:ext cx="2078659" cy="320040"/>
+            <a:off x="3660571" y="3877056"/>
+            <a:ext cx="2078659" cy="292608"/>
           </a:xfrm>
           <a:prstGeom prst="rect">
             <a:avLst/>
@@ -14063,8 +14063,8 @@
         </p:nvSpPr>
         <p:spPr>
           <a:xfrm>
-            <a:off x="6223863" y="3383280"/>
-            <a:ext cx="2535859" cy="1371600"/>
+            <a:off x="6223863" y="3035808"/>
+            <a:ext cx="2535859" cy="1152144"/>
           </a:xfrm>
           <a:prstGeom prst="roundRect">
             <a:avLst/>
@@ -14094,7 +14094,7 @@
         </p:nvSpPr>
         <p:spPr>
           <a:xfrm>
-            <a:off x="6223863" y="3383280"/>
+            <a:off x="6223863" y="3035808"/>
             <a:ext cx="2535859" cy="54864"/>
           </a:xfrm>
           <a:prstGeom prst="rect">
@@ -14123,7 +14123,7 @@
         </p:nvSpPr>
         <p:spPr>
           <a:xfrm>
-            <a:off x="6452463" y="3621024"/>
+            <a:off x="6452463" y="3218688"/>
             <a:ext cx="2078659" cy="274320"/>
           </a:xfrm>
           <a:prstGeom prst="rect">
@@ -14139,7 +14139,7 @@
           <a:p>
             <a:pPr algn="l"/>
             <a:r>
-              <a:rPr sz="1300" b="1">
+              <a:rPr sz="1200" b="1">
                 <a:solidFill>
                   <a:srgbClr val="E8A317"/>
                 </a:solidFill>
@@ -14160,7 +14160,7 @@
         </p:nvSpPr>
         <p:spPr>
           <a:xfrm>
-            <a:off x="6452463" y="3913632"/>
+            <a:off x="6452463" y="3493008"/>
             <a:ext cx="2078659" cy="365760"/>
           </a:xfrm>
           <a:prstGeom prst="rect">
@@ -14197,8 +14197,8 @@
         </p:nvSpPr>
         <p:spPr>
           <a:xfrm>
-            <a:off x="6452463" y="4315968"/>
-            <a:ext cx="2078659" cy="320040"/>
+            <a:off x="6452463" y="3877056"/>
+            <a:ext cx="2078659" cy="292608"/>
           </a:xfrm>
           <a:prstGeom prst="rect">
             <a:avLst/>
@@ -14234,8 +14234,8 @@
         </p:nvSpPr>
         <p:spPr>
           <a:xfrm>
-            <a:off x="9015755" y="3383280"/>
-            <a:ext cx="2535859" cy="1371600"/>
+            <a:off x="9015755" y="3035808"/>
+            <a:ext cx="2535859" cy="1152144"/>
           </a:xfrm>
           <a:prstGeom prst="roundRect">
             <a:avLst/>
@@ -14265,7 +14265,7 @@
         </p:nvSpPr>
         <p:spPr>
           <a:xfrm>
-            <a:off x="9015755" y="3383280"/>
+            <a:off x="9015755" y="3035808"/>
             <a:ext cx="2535859" cy="54864"/>
           </a:xfrm>
           <a:prstGeom prst="rect">
@@ -14294,7 +14294,7 @@
         </p:nvSpPr>
         <p:spPr>
           <a:xfrm>
-            <a:off x="9244355" y="3621024"/>
+            <a:off x="9244355" y="3218688"/>
             <a:ext cx="2078659" cy="274320"/>
           </a:xfrm>
           <a:prstGeom prst="rect">
@@ -14310,7 +14310,7 @@
           <a:p>
             <a:pPr algn="l"/>
             <a:r>
-              <a:rPr sz="1300" b="1">
+              <a:rPr sz="1200" b="1">
                 <a:solidFill>
                   <a:srgbClr val="E8A317"/>
                 </a:solidFill>
@@ -14331,7 +14331,7 @@
         </p:nvSpPr>
         <p:spPr>
           <a:xfrm>
-            <a:off x="9244355" y="3913632"/>
+            <a:off x="9244355" y="3493008"/>
             <a:ext cx="2078659" cy="365760"/>
           </a:xfrm>
           <a:prstGeom prst="rect">
@@ -14368,8 +14368,8 @@
         </p:nvSpPr>
         <p:spPr>
           <a:xfrm>
-            <a:off x="9244355" y="4315968"/>
-            <a:ext cx="2078659" cy="320040"/>
+            <a:off x="9244355" y="3877056"/>
+            <a:ext cx="2078659" cy="292608"/>
           </a:xfrm>
           <a:prstGeom prst="rect">
             <a:avLst/>
@@ -14405,14 +14405,14 @@
         </p:nvSpPr>
         <p:spPr>
           <a:xfrm>
-            <a:off x="640080" y="4892040"/>
-            <a:ext cx="10911535" cy="868680"/>
+            <a:off x="3431971" y="4370832"/>
+            <a:ext cx="2535859" cy="1152144"/>
           </a:xfrm>
           <a:prstGeom prst="roundRect">
             <a:avLst/>
           </a:prstGeom>
           <a:solidFill>
-            <a:srgbClr val="EAEFE7"/>
+            <a:srgbClr val="FFFFFF"/>
           </a:solidFill>
           <a:ln w="12700">
             <a:solidFill>
@@ -14430,14 +14430,43 @@
       </p:sp>
       <p:sp>
         <p:nvSpPr>
-          <p:cNvPr id="47" name="TextBox 46"/>
-          <p:cNvSpPr txBox="1"/>
-          <p:nvPr/>
-        </p:nvSpPr>
-        <p:spPr>
-          <a:xfrm>
-            <a:off x="960119" y="5120640"/>
-            <a:ext cx="10271455" cy="411480"/>
+          <p:cNvPr id="47" name="Rectangle 46"/>
+          <p:cNvSpPr/>
+          <p:nvPr/>
+        </p:nvSpPr>
+        <p:spPr>
+          <a:xfrm>
+            <a:off x="3431971" y="4370832"/>
+            <a:ext cx="2535859" cy="54864"/>
+          </a:xfrm>
+          <a:prstGeom prst="rect">
+            <a:avLst/>
+          </a:prstGeom>
+          <a:solidFill>
+            <a:srgbClr val="0F3D2E"/>
+          </a:solidFill>
+          <a:ln>
+            <a:noFill/>
+          </a:ln>
+        </p:spPr>
+        <p:txBody>
+          <a:bodyPr rtlCol="0" anchor="ctr"/>
+          <a:lstStyle/>
+          <a:p>
+            <a:pPr algn="ctr"/>
+          </a:p>
+        </p:txBody>
+      </p:sp>
+      <p:sp>
+        <p:nvSpPr>
+          <p:cNvPr id="48" name="TextBox 47"/>
+          <p:cNvSpPr txBox="1"/>
+          <p:nvPr/>
+        </p:nvSpPr>
+        <p:spPr>
+          <a:xfrm>
+            <a:off x="3660571" y="4553712"/>
+            <a:ext cx="2078659" cy="274320"/>
           </a:xfrm>
           <a:prstGeom prst="rect">
             <a:avLst/>
@@ -14452,22 +14481,304 @@
           <a:p>
             <a:pPr algn="l"/>
             <a:r>
+              <a:rPr sz="1200" b="1">
+                <a:solidFill>
+                  <a:srgbClr val="E8A317"/>
+                </a:solidFill>
+                <a:latin typeface="Microsoft YaHei"/>
+                <a:ea typeface="Microsoft YaHei"/>
+                <a:cs typeface="Microsoft YaHei"/>
+              </a:rPr>
+              <a:t>09</a:t>
+            </a:r>
+          </a:p>
+        </p:txBody>
+      </p:sp>
+      <p:sp>
+        <p:nvSpPr>
+          <p:cNvPr id="49" name="TextBox 48"/>
+          <p:cNvSpPr txBox="1"/>
+          <p:nvPr/>
+        </p:nvSpPr>
+        <p:spPr>
+          <a:xfrm>
+            <a:off x="3660571" y="4828032"/>
+            <a:ext cx="2078659" cy="365760"/>
+          </a:xfrm>
+          <a:prstGeom prst="rect">
+            <a:avLst/>
+          </a:prstGeom>
+          <a:noFill/>
+        </p:spPr>
+        <p:txBody>
+          <a:bodyPr wrap="square">
+            <a:spAutoFit/>
+          </a:bodyPr>
+          <a:lstStyle/>
+          <a:p>
+            <a:pPr algn="l"/>
+            <a:r>
               <a:rPr sz="1600" b="1">
                 <a:solidFill>
-                  <a:srgbClr val="14201A"/>
-                </a:solidFill>
-                <a:latin typeface="Microsoft YaHei"/>
-                <a:ea typeface="Microsoft YaHei"/>
-                <a:cs typeface="Microsoft YaHei"/>
-              </a:rPr>
-              <a:t>记录 → 计算 → 激励，形成可持续的低碳闭环。</a:t>
-            </a:r>
-          </a:p>
-        </p:txBody>
-      </p:sp>
-      <p:sp>
-        <p:nvSpPr>
-          <p:cNvPr id="48" name="TextBox 47"/>
+                  <a:srgbClr val="0F3D2E"/>
+                </a:solidFill>
+                <a:latin typeface="Microsoft YaHei"/>
+                <a:ea typeface="Microsoft YaHei"/>
+                <a:cs typeface="Microsoft YaHei"/>
+              </a:rPr>
+              <a:t>碳小树</a:t>
+            </a:r>
+          </a:p>
+        </p:txBody>
+      </p:sp>
+      <p:sp>
+        <p:nvSpPr>
+          <p:cNvPr id="50" name="TextBox 49"/>
+          <p:cNvSpPr txBox="1"/>
+          <p:nvPr/>
+        </p:nvSpPr>
+        <p:spPr>
+          <a:xfrm>
+            <a:off x="3660571" y="5212080"/>
+            <a:ext cx="2078659" cy="292608"/>
+          </a:xfrm>
+          <a:prstGeom prst="rect">
+            <a:avLst/>
+          </a:prstGeom>
+          <a:noFill/>
+        </p:spPr>
+        <p:txBody>
+          <a:bodyPr wrap="square">
+            <a:spAutoFit/>
+          </a:bodyPr>
+          <a:lstStyle/>
+          <a:p>
+            <a:pPr algn="l"/>
+            <a:r>
+              <a:rPr sz="1200" b="0">
+                <a:solidFill>
+                  <a:srgbClr val="6A7562"/>
+                </a:solidFill>
+                <a:latin typeface="Microsoft YaHei"/>
+                <a:ea typeface="Microsoft YaHei"/>
+                <a:cs typeface="Microsoft YaHei"/>
+              </a:rPr>
+              <a:t>按真实记录养成</a:t>
+            </a:r>
+          </a:p>
+        </p:txBody>
+      </p:sp>
+      <p:sp>
+        <p:nvSpPr>
+          <p:cNvPr id="51" name="Rounded Rectangle 50"/>
+          <p:cNvSpPr/>
+          <p:nvPr/>
+        </p:nvSpPr>
+        <p:spPr>
+          <a:xfrm>
+            <a:off x="6223863" y="4370832"/>
+            <a:ext cx="2535859" cy="1152144"/>
+          </a:xfrm>
+          <a:prstGeom prst="roundRect">
+            <a:avLst/>
+          </a:prstGeom>
+          <a:solidFill>
+            <a:srgbClr val="FFFFFF"/>
+          </a:solidFill>
+          <a:ln w="12700">
+            <a:solidFill>
+              <a:srgbClr val="DCE4D8"/>
+            </a:solidFill>
+          </a:ln>
+        </p:spPr>
+        <p:txBody>
+          <a:bodyPr rtlCol="0" anchor="ctr"/>
+          <a:lstStyle/>
+          <a:p>
+            <a:pPr algn="ctr"/>
+          </a:p>
+        </p:txBody>
+      </p:sp>
+      <p:sp>
+        <p:nvSpPr>
+          <p:cNvPr id="52" name="Rectangle 51"/>
+          <p:cNvSpPr/>
+          <p:nvPr/>
+        </p:nvSpPr>
+        <p:spPr>
+          <a:xfrm>
+            <a:off x="6223863" y="4370832"/>
+            <a:ext cx="2535859" cy="54864"/>
+          </a:xfrm>
+          <a:prstGeom prst="rect">
+            <a:avLst/>
+          </a:prstGeom>
+          <a:solidFill>
+            <a:srgbClr val="E8A317"/>
+          </a:solidFill>
+          <a:ln>
+            <a:noFill/>
+          </a:ln>
+        </p:spPr>
+        <p:txBody>
+          <a:bodyPr rtlCol="0" anchor="ctr"/>
+          <a:lstStyle/>
+          <a:p>
+            <a:pPr algn="ctr"/>
+          </a:p>
+        </p:txBody>
+      </p:sp>
+      <p:sp>
+        <p:nvSpPr>
+          <p:cNvPr id="53" name="TextBox 52"/>
+          <p:cNvSpPr txBox="1"/>
+          <p:nvPr/>
+        </p:nvSpPr>
+        <p:spPr>
+          <a:xfrm>
+            <a:off x="6452463" y="4553712"/>
+            <a:ext cx="2078659" cy="274320"/>
+          </a:xfrm>
+          <a:prstGeom prst="rect">
+            <a:avLst/>
+          </a:prstGeom>
+          <a:noFill/>
+        </p:spPr>
+        <p:txBody>
+          <a:bodyPr wrap="square">
+            <a:spAutoFit/>
+          </a:bodyPr>
+          <a:lstStyle/>
+          <a:p>
+            <a:pPr algn="l"/>
+            <a:r>
+              <a:rPr sz="1200" b="1">
+                <a:solidFill>
+                  <a:srgbClr val="E8A317"/>
+                </a:solidFill>
+                <a:latin typeface="Microsoft YaHei"/>
+                <a:ea typeface="Microsoft YaHei"/>
+                <a:cs typeface="Microsoft YaHei"/>
+              </a:rPr>
+              <a:t>10</a:t>
+            </a:r>
+          </a:p>
+        </p:txBody>
+      </p:sp>
+      <p:sp>
+        <p:nvSpPr>
+          <p:cNvPr id="54" name="TextBox 53"/>
+          <p:cNvSpPr txBox="1"/>
+          <p:nvPr/>
+        </p:nvSpPr>
+        <p:spPr>
+          <a:xfrm>
+            <a:off x="6452463" y="4828032"/>
+            <a:ext cx="2078659" cy="365760"/>
+          </a:xfrm>
+          <a:prstGeom prst="rect">
+            <a:avLst/>
+          </a:prstGeom>
+          <a:noFill/>
+        </p:spPr>
+        <p:txBody>
+          <a:bodyPr wrap="square">
+            <a:spAutoFit/>
+          </a:bodyPr>
+          <a:lstStyle/>
+          <a:p>
+            <a:pPr algn="l"/>
+            <a:r>
+              <a:rPr sz="1600" b="1">
+                <a:solidFill>
+                  <a:srgbClr val="0F3D2E"/>
+                </a:solidFill>
+                <a:latin typeface="Microsoft YaHei"/>
+                <a:ea typeface="Microsoft YaHei"/>
+                <a:cs typeface="Microsoft YaHei"/>
+              </a:rPr>
+              <a:t>碳账单</a:t>
+            </a:r>
+          </a:p>
+        </p:txBody>
+      </p:sp>
+      <p:sp>
+        <p:nvSpPr>
+          <p:cNvPr id="55" name="TextBox 54"/>
+          <p:cNvSpPr txBox="1"/>
+          <p:nvPr/>
+        </p:nvSpPr>
+        <p:spPr>
+          <a:xfrm>
+            <a:off x="6452463" y="5212080"/>
+            <a:ext cx="2078659" cy="292608"/>
+          </a:xfrm>
+          <a:prstGeom prst="rect">
+            <a:avLst/>
+          </a:prstGeom>
+          <a:noFill/>
+        </p:spPr>
+        <p:txBody>
+          <a:bodyPr wrap="square">
+            <a:spAutoFit/>
+          </a:bodyPr>
+          <a:lstStyle/>
+          <a:p>
+            <a:pPr algn="l"/>
+            <a:r>
+              <a:rPr sz="1200" b="0">
+                <a:solidFill>
+                  <a:srgbClr val="6A7562"/>
+                </a:solidFill>
+                <a:latin typeface="Microsoft YaHei"/>
+                <a:ea typeface="Microsoft YaHei"/>
+                <a:cs typeface="Microsoft YaHei"/>
+              </a:rPr>
+              <a:t>一键生成分享报告</a:t>
+            </a:r>
+          </a:p>
+        </p:txBody>
+      </p:sp>
+      <p:sp>
+        <p:nvSpPr>
+          <p:cNvPr id="56" name="TextBox 55"/>
+          <p:cNvSpPr txBox="1"/>
+          <p:nvPr/>
+        </p:nvSpPr>
+        <p:spPr>
+          <a:xfrm>
+            <a:off x="640080" y="5760720"/>
+            <a:ext cx="10911535" cy="365760"/>
+          </a:xfrm>
+          <a:prstGeom prst="rect">
+            <a:avLst/>
+          </a:prstGeom>
+          <a:noFill/>
+        </p:spPr>
+        <p:txBody>
+          <a:bodyPr wrap="square">
+            <a:spAutoFit/>
+          </a:bodyPr>
+          <a:lstStyle/>
+          <a:p>
+            <a:pPr algn="ctr"/>
+            <a:r>
+              <a:rPr sz="1400" b="0">
+                <a:solidFill>
+                  <a:srgbClr val="6A7562"/>
+                </a:solidFill>
+                <a:latin typeface="Microsoft YaHei"/>
+                <a:ea typeface="Microsoft YaHei"/>
+                <a:cs typeface="Microsoft YaHei"/>
+              </a:rPr>
+              <a:t>记录 → 计算 → 激励 → 回馈；数据可导入导出，账单可一键分享。</a:t>
+            </a:r>
+          </a:p>
+        </p:txBody>
+      </p:sp>
+      <p:sp>
+        <p:nvSpPr>
+          <p:cNvPr id="57" name="TextBox 56"/>
           <p:cNvSpPr txBox="1"/>
           <p:nvPr/>
         </p:nvSpPr>
@@ -14504,7 +14815,7 @@
       </p:sp>
       <p:sp>
         <p:nvSpPr>
-          <p:cNvPr id="49" name="TextBox 48"/>
+          <p:cNvPr id="58" name="TextBox 57"/>
           <p:cNvSpPr txBox="1"/>
           <p:nvPr/>
         </p:nvSpPr>
@@ -16769,7 +17080,7 @@
                 <a:ea typeface="Microsoft YaHei"/>
                 <a:cs typeface="Microsoft YaHei"/>
               </a:rPr>
-              <a:t>导入导出</a:t>
+              <a:t>导入 · 分享</a:t>
             </a:r>
           </a:p>
         </p:txBody>
@@ -16806,7 +17117,7 @@
                 <a:ea typeface="Microsoft YaHei"/>
                 <a:cs typeface="Microsoft YaHei"/>
               </a:rPr>
-              <a:t>CSV / JSON 互导（UTF-8 BOM，Excel 不乱码）</a:t>
+              <a:t>CSV / JSON 互导 · 报告 PNG</a:t>
             </a:r>
           </a:p>
         </p:txBody>
@@ -17578,8 +17889,8 @@
         </p:nvSpPr>
         <p:spPr>
           <a:xfrm>
-            <a:off x="8313208" y="1636776"/>
-            <a:ext cx="2393102" cy="4498848"/>
+            <a:off x="8364744" y="1636776"/>
+            <a:ext cx="2290031" cy="4498848"/>
           </a:xfrm>
           <a:prstGeom prst="roundRect">
             <a:avLst/>
@@ -17617,8 +17928,8 @@
         </p:blipFill>
         <p:spPr>
           <a:xfrm>
-            <a:off x="8459512" y="1783080"/>
-            <a:ext cx="2100494" cy="4206240"/>
+            <a:off x="8511048" y="1783080"/>
+            <a:ext cx="1997423" cy="4206240"/>
           </a:xfrm>
           <a:prstGeom prst="rect">
             <a:avLst/>

--- a/docs/tasks/ppt/CarbonLife-答辩PPT.pptx
+++ b/docs/tasks/ppt/CarbonLife-答辩PPT.pptx
@@ -656,7 +656,7 @@
           <a:lstStyle/>
           <a:p>
             <a:r>
-              <a:t>整体采用可跟随系统的浅 / 深双主题，颜色与控件统一走设计规范，关键动效尊重「减弱动效」开关。</a:t>
+              <a:t>整体采用可跟随系统的浅 / 深双主题，颜色与控件统一走设计规范，关键动效尊重「减弱动效」开关。整套材料用浅色便于投影；App 本体默认深色「夜行荧光」，强调色是电青 #3DE0C8，琥珀只用于演示材料。</a:t>
             </a:r>
           </a:p>
         </p:txBody>
@@ -866,7 +866,7 @@
           <a:lstStyle/>
           <a:p>
             <a:r>
-              <a:t>项目采用「写审分离 + 设备验证」，在模拟器上逐条核对验收清单；记录刷新、图表刷新、家庭聚合（本地侧）与设备端 UI 冒烟 20/20 已通过，分布式权限弹窗与跨设备家庭聚合仍需真机复测。</a:t>
+              <a:t>项目采用「写审分离 + 设备验证」，在模拟器上逐条核对验收清单；记录刷新、图表刷新、家庭聚合（本地侧）与碳小树 / 碳账单已复测通过，外壳冒烟 20/20 只覆盖导航与布局；分布式权限弹窗与跨设备家庭聚合仍需真机复测，云备份端到端仍为 BLOCKED，导入运行时待复测。</a:t>
             </a:r>
           </a:p>
         </p:txBody>
@@ -4586,7 +4586,7 @@
             <a:r>
               <a:rPr sz="1200" b="1">
                 <a:solidFill>
-                  <a:srgbClr val="E8A317"/>
+                  <a:srgbClr val="8A5A00"/>
                 </a:solidFill>
                 <a:latin typeface="Microsoft YaHei"/>
                 <a:ea typeface="Microsoft YaHei"/>
@@ -5172,7 +5172,7 @@
             <a:r>
               <a:rPr sz="1300" b="1">
                 <a:solidFill>
-                  <a:srgbClr val="E8A317"/>
+                  <a:srgbClr val="8A5A00"/>
                 </a:solidFill>
                 <a:latin typeface="Microsoft YaHei"/>
                 <a:ea typeface="Microsoft YaHei"/>
@@ -5465,7 +5465,7 @@
                 <a:ea typeface="Microsoft YaHei"/>
                 <a:cs typeface="Microsoft YaHei"/>
               </a:rPr>
-              <a:t>减排有回馈：积分 · 荣誉 · 树苗</a:t>
+              <a:t>减排有回馈：积分 · 荣誉 · 碳小树</a:t>
             </a:r>
           </a:p>
         </p:txBody>
@@ -5754,7 +5754,7 @@
             <a:r>
               <a:rPr sz="1400" b="1">
                 <a:solidFill>
-                  <a:srgbClr val="FFFFFF"/>
+                  <a:srgbClr val="14201A"/>
                 </a:solidFill>
                 <a:latin typeface="Microsoft YaHei"/>
                 <a:ea typeface="Microsoft YaHei"/>
@@ -5937,7 +5937,7 @@
                 <a:ea typeface="Microsoft YaHei"/>
                 <a:cs typeface="Microsoft YaHei"/>
               </a:rPr>
-              <a:t>树苗</a:t>
+              <a:t>碳小树</a:t>
             </a:r>
           </a:p>
         </p:txBody>
@@ -6453,7 +6453,7 @@
                 <a:ea typeface="Microsoft YaHei"/>
                 <a:cs typeface="Microsoft YaHei"/>
               </a:rPr>
-              <a:t>暖白纸感底，深林绿为品牌、琥珀金为强调</a:t>
+              <a:t>浅色演示稿；App 默认深色，电青为强调</a:t>
             </a:r>
           </a:p>
         </p:txBody>
@@ -6513,7 +6513,7 @@
             <a:r>
               <a:rPr sz="1400" b="1">
                 <a:solidFill>
-                  <a:srgbClr val="FFFFFF"/>
+                  <a:srgbClr val="14201A"/>
                 </a:solidFill>
                 <a:latin typeface="Microsoft YaHei"/>
                 <a:ea typeface="Microsoft YaHei"/>
@@ -6793,7 +6793,7 @@
             <a:r>
               <a:rPr sz="1400" b="1">
                 <a:solidFill>
-                  <a:srgbClr val="FFFFFF"/>
+                  <a:srgbClr val="14201A"/>
                 </a:solidFill>
                 <a:latin typeface="Microsoft YaHei"/>
                 <a:ea typeface="Microsoft YaHei"/>
@@ -9429,7 +9429,7 @@
         <p:spPr>
           <a:xfrm>
             <a:off x="6080760" y="2514600"/>
-            <a:ext cx="5166360" cy="1371600"/>
+            <a:ext cx="5166360" cy="1417320"/>
           </a:xfrm>
           <a:prstGeom prst="roundRect">
             <a:avLst/>
@@ -9483,7 +9483,7 @@
                 <a:ea typeface="Microsoft YaHei"/>
                 <a:cs typeface="Microsoft YaHei"/>
               </a:rPr>
-              <a:t>✓ 已通过</a:t>
+              <a:t>✓ 已复测通过</a:t>
             </a:r>
           </a:p>
         </p:txBody>
@@ -9497,7 +9497,7 @@
         <p:spPr>
           <a:xfrm>
             <a:off x="6263640" y="3017520"/>
-            <a:ext cx="4846320" cy="822960"/>
+            <a:ext cx="4846320" cy="914400"/>
           </a:xfrm>
           <a:prstGeom prst="rect">
             <a:avLst/>
@@ -9512,14 +9512,14 @@
           <a:p>
             <a:pPr algn="l">
               <a:spcBef>
-                <a:spcPts val="200"/>
+                <a:spcPts val="500"/>
               </a:spcBef>
               <a:spcAft>
-                <a:spcPts val="200"/>
+                <a:spcPts val="500"/>
               </a:spcAft>
             </a:pPr>
             <a:r>
-              <a:rPr sz="1300" b="0">
+              <a:rPr sz="1200" b="0">
                 <a:solidFill>
                   <a:srgbClr val="14201A"/>
                 </a:solidFill>
@@ -9527,7 +9527,28 @@
                 <a:ea typeface="Microsoft YaHei"/>
                 <a:cs typeface="Microsoft YaHei"/>
               </a:rPr>
-              <a:t>记录增删实时刷新 · 图表刷新 · 家庭聚合（本地侧） · UI 冒烟 20/20（手机 + 平板）</a:t>
+              <a:t>记录增删实时刷新 · 图表刷新 · 家庭聚合（本地侧）</a:t>
+            </a:r>
+          </a:p>
+          <a:p>
+            <a:pPr algn="l">
+              <a:spcBef>
+                <a:spcPts val="500"/>
+              </a:spcBef>
+              <a:spcAft>
+                <a:spcPts val="500"/>
+              </a:spcAft>
+            </a:pPr>
+            <a:r>
+              <a:rPr sz="1200" b="0">
+                <a:solidFill>
+                  <a:srgbClr val="14201A"/>
+                </a:solidFill>
+                <a:latin typeface="Microsoft YaHei"/>
+                <a:ea typeface="Microsoft YaHei"/>
+                <a:cs typeface="Microsoft YaHei"/>
+              </a:rPr>
+              <a:t>碳小树 / 碳账单 · 外壳冒烟 20/20（仅导航 / 布局）</a:t>
             </a:r>
           </a:p>
         </p:txBody>
@@ -9540,8 +9561,8 @@
         </p:nvSpPr>
         <p:spPr>
           <a:xfrm>
-            <a:off x="6080760" y="4114800"/>
-            <a:ext cx="5166360" cy="1371600"/>
+            <a:off x="6080760" y="4069080"/>
+            <a:ext cx="5166360" cy="1554480"/>
           </a:xfrm>
           <a:prstGeom prst="roundRect">
             <a:avLst/>
@@ -9571,7 +9592,7 @@
         </p:nvSpPr>
         <p:spPr>
           <a:xfrm>
-            <a:off x="6263640" y="4251960"/>
+            <a:off x="6263640" y="4160520"/>
             <a:ext cx="4846320" cy="320040"/>
           </a:xfrm>
           <a:prstGeom prst="rect">
@@ -9589,13 +9610,13 @@
             <a:r>
               <a:rPr sz="1400" b="1">
                 <a:solidFill>
-                  <a:srgbClr val="E8A317"/>
-                </a:solidFill>
-                <a:latin typeface="Microsoft YaHei"/>
-                <a:ea typeface="Microsoft YaHei"/>
-                <a:cs typeface="Microsoft YaHei"/>
-              </a:rPr>
-              <a:t>! 待真机复测</a:t>
+                  <a:srgbClr val="8A5A00"/>
+                </a:solidFill>
+                <a:latin typeface="Microsoft YaHei"/>
+                <a:ea typeface="Microsoft YaHei"/>
+                <a:cs typeface="Microsoft YaHei"/>
+              </a:rPr>
+              <a:t>! 待真机 / 待复测</a:t>
             </a:r>
           </a:p>
         </p:txBody>
@@ -9608,8 +9629,8 @@
         </p:nvSpPr>
         <p:spPr>
           <a:xfrm>
-            <a:off x="6263640" y="4617720"/>
-            <a:ext cx="4846320" cy="822960"/>
+            <a:off x="6263640" y="4526280"/>
+            <a:ext cx="4846320" cy="1005840"/>
           </a:xfrm>
           <a:prstGeom prst="rect">
             <a:avLst/>
@@ -9624,14 +9645,14 @@
           <a:p>
             <a:pPr algn="l">
               <a:spcBef>
-                <a:spcPts val="200"/>
+                <a:spcPts val="500"/>
               </a:spcBef>
               <a:spcAft>
-                <a:spcPts val="200"/>
+                <a:spcPts val="500"/>
               </a:spcAft>
             </a:pPr>
             <a:r>
-              <a:rPr sz="1300" b="0">
+              <a:rPr sz="1200" b="0">
                 <a:solidFill>
                   <a:srgbClr val="14201A"/>
                 </a:solidFill>
@@ -9640,6 +9661,27 @@
                 <a:cs typeface="Microsoft YaHei"/>
               </a:rPr>
               <a:t>分布式权限弹窗 · 跨设备家庭聚合</a:t>
+            </a:r>
+          </a:p>
+          <a:p>
+            <a:pPr algn="l">
+              <a:spcBef>
+                <a:spcPts val="500"/>
+              </a:spcBef>
+              <a:spcAft>
+                <a:spcPts val="500"/>
+              </a:spcAft>
+            </a:pPr>
+            <a:r>
+              <a:rPr sz="1200" b="0">
+                <a:solidFill>
+                  <a:srgbClr val="14201A"/>
+                </a:solidFill>
+                <a:latin typeface="Microsoft YaHei"/>
+                <a:ea typeface="Microsoft YaHei"/>
+                <a:cs typeface="Microsoft YaHei"/>
+              </a:rPr>
+              <a:t>云备份端到端（BLOCKED）· 导入运行时</a:t>
             </a:r>
           </a:p>
         </p:txBody>
@@ -9820,7 +9862,7 @@
             <a:r>
               <a:rPr sz="1200" b="1">
                 <a:solidFill>
-                  <a:srgbClr val="E8A317"/>
+                  <a:srgbClr val="8A5A00"/>
                 </a:solidFill>
                 <a:latin typeface="Microsoft YaHei"/>
                 <a:ea typeface="Microsoft YaHei"/>
@@ -11521,7 +11563,7 @@
             <a:r>
               <a:rPr sz="2600" b="1">
                 <a:solidFill>
-                  <a:srgbClr val="FFFFFF"/>
+                  <a:srgbClr val="14201A"/>
                 </a:solidFill>
                 <a:latin typeface="Microsoft YaHei"/>
                 <a:ea typeface="Microsoft YaHei"/>
@@ -11757,7 +11799,7 @@
             <a:r>
               <a:rPr sz="2600" b="1">
                 <a:solidFill>
-                  <a:srgbClr val="FFFFFF"/>
+                  <a:srgbClr val="14201A"/>
                 </a:solidFill>
                 <a:latin typeface="Microsoft YaHei"/>
                 <a:ea typeface="Microsoft YaHei"/>
@@ -13115,7 +13157,7 @@
             <a:r>
               <a:rPr sz="1200" b="1">
                 <a:solidFill>
-                  <a:srgbClr val="E8A317"/>
+                  <a:srgbClr val="8A5A00"/>
                 </a:solidFill>
                 <a:latin typeface="Microsoft YaHei"/>
                 <a:ea typeface="Microsoft YaHei"/>
@@ -13286,7 +13328,7 @@
             <a:r>
               <a:rPr sz="1200" b="1">
                 <a:solidFill>
-                  <a:srgbClr val="E8A317"/>
+                  <a:srgbClr val="8A5A00"/>
                 </a:solidFill>
                 <a:latin typeface="Microsoft YaHei"/>
                 <a:ea typeface="Microsoft YaHei"/>
@@ -13457,7 +13499,7 @@
             <a:r>
               <a:rPr sz="1200" b="1">
                 <a:solidFill>
-                  <a:srgbClr val="E8A317"/>
+                  <a:srgbClr val="8A5A00"/>
                 </a:solidFill>
                 <a:latin typeface="Microsoft YaHei"/>
                 <a:ea typeface="Microsoft YaHei"/>
@@ -13628,7 +13670,7 @@
             <a:r>
               <a:rPr sz="1200" b="1">
                 <a:solidFill>
-                  <a:srgbClr val="E8A317"/>
+                  <a:srgbClr val="8A5A00"/>
                 </a:solidFill>
                 <a:latin typeface="Microsoft YaHei"/>
                 <a:ea typeface="Microsoft YaHei"/>
@@ -13799,7 +13841,7 @@
             <a:r>
               <a:rPr sz="1200" b="1">
                 <a:solidFill>
-                  <a:srgbClr val="E8A317"/>
+                  <a:srgbClr val="8A5A00"/>
                 </a:solidFill>
                 <a:latin typeface="Microsoft YaHei"/>
                 <a:ea typeface="Microsoft YaHei"/>
@@ -13970,7 +14012,7 @@
             <a:r>
               <a:rPr sz="1200" b="1">
                 <a:solidFill>
-                  <a:srgbClr val="E8A317"/>
+                  <a:srgbClr val="8A5A00"/>
                 </a:solidFill>
                 <a:latin typeface="Microsoft YaHei"/>
                 <a:ea typeface="Microsoft YaHei"/>
@@ -14141,7 +14183,7 @@
             <a:r>
               <a:rPr sz="1200" b="1">
                 <a:solidFill>
-                  <a:srgbClr val="E8A317"/>
+                  <a:srgbClr val="8A5A00"/>
                 </a:solidFill>
                 <a:latin typeface="Microsoft YaHei"/>
                 <a:ea typeface="Microsoft YaHei"/>
@@ -14312,7 +14354,7 @@
             <a:r>
               <a:rPr sz="1200" b="1">
                 <a:solidFill>
-                  <a:srgbClr val="E8A317"/>
+                  <a:srgbClr val="8A5A00"/>
                 </a:solidFill>
                 <a:latin typeface="Microsoft YaHei"/>
                 <a:ea typeface="Microsoft YaHei"/>
@@ -14483,7 +14525,7 @@
             <a:r>
               <a:rPr sz="1200" b="1">
                 <a:solidFill>
-                  <a:srgbClr val="E8A317"/>
+                  <a:srgbClr val="8A5A00"/>
                 </a:solidFill>
                 <a:latin typeface="Microsoft YaHei"/>
                 <a:ea typeface="Microsoft YaHei"/>
@@ -14654,7 +14696,7 @@
             <a:r>
               <a:rPr sz="1200" b="1">
                 <a:solidFill>
-                  <a:srgbClr val="E8A317"/>
+                  <a:srgbClr val="8A5A00"/>
                 </a:solidFill>
                 <a:latin typeface="Microsoft YaHei"/>
                 <a:ea typeface="Microsoft YaHei"/>
@@ -14763,7 +14805,7 @@
           <a:p>
             <a:pPr algn="ctr"/>
             <a:r>
-              <a:rPr sz="1400" b="0">
+              <a:rPr sz="1300" b="0">
                 <a:solidFill>
                   <a:srgbClr val="6A7562"/>
                 </a:solidFill>
@@ -14771,7 +14813,7 @@
                 <a:ea typeface="Microsoft YaHei"/>
                 <a:cs typeface="Microsoft YaHei"/>
               </a:rPr>
-              <a:t>记录 → 计算 → 激励 → 回馈；数据可导入导出，账单可一键分享。</a:t>
+              <a:t>记录 → 计算 → 激励 → 回馈；数据可导入导出，账单可一键分享，另含本地 / 云备份。</a:t>
             </a:r>
           </a:p>
         </p:txBody>
@@ -15129,7 +15171,7 @@
                 <a:ea typeface="Microsoft YaHei"/>
                 <a:cs typeface="Microsoft YaHei"/>
               </a:rPr>
-              <a:t>步行 / 骑行 / 公交 …</a:t>
+              <a:t>步行 / 骑行 / 公交 / 地铁</a:t>
             </a:r>
           </a:p>
         </p:txBody>
@@ -15263,7 +15305,7 @@
                 <a:ea typeface="Microsoft YaHei"/>
                 <a:cs typeface="Microsoft YaHei"/>
               </a:rPr>
-              <a:t>节电 / 节水 …</a:t>
+              <a:t>节电 / 节水</a:t>
             </a:r>
           </a:p>
         </p:txBody>
@@ -15397,7 +15439,7 @@
                 <a:ea typeface="Microsoft YaHei"/>
                 <a:cs typeface="Microsoft YaHei"/>
               </a:rPr>
-              <a:t>纸张 / 塑料 / 旧物 …</a:t>
+              <a:t>纸张 / 塑料 / 金属 / 旧衣</a:t>
             </a:r>
           </a:p>
         </p:txBody>
@@ -15531,7 +15573,7 @@
                 <a:ea typeface="Microsoft YaHei"/>
                 <a:cs typeface="Microsoft YaHei"/>
               </a:rPr>
-              <a:t>光盘行动 …</a:t>
+              <a:t>光盘 / 少用一次性 / 素食</a:t>
             </a:r>
           </a:p>
         </p:txBody>
@@ -16138,7 +16180,7 @@
             <a:r>
               <a:rPr sz="1400" b="1">
                 <a:solidFill>
-                  <a:srgbClr val="FFFFFF"/>
+                  <a:srgbClr val="14201A"/>
                 </a:solidFill>
                 <a:latin typeface="Microsoft YaHei"/>
                 <a:ea typeface="Microsoft YaHei"/>
@@ -16897,7 +16939,7 @@
             <a:r>
               <a:rPr sz="1400" b="1">
                 <a:solidFill>
-                  <a:srgbClr val="FFFFFF"/>
+                  <a:srgbClr val="14201A"/>
                 </a:solidFill>
                 <a:latin typeface="Microsoft YaHei"/>
                 <a:ea typeface="Microsoft YaHei"/>
@@ -17656,7 +17698,7 @@
             <a:r>
               <a:rPr sz="1400" b="1">
                 <a:solidFill>
-                  <a:srgbClr val="FFFFFF"/>
+                  <a:srgbClr val="14201A"/>
                 </a:solidFill>
                 <a:latin typeface="Microsoft YaHei"/>
                 <a:ea typeface="Microsoft YaHei"/>
